--- a/开题答辩.pptx
+++ b/开题答辩.pptx
@@ -1,25 +1,25 @@
 
 <file path=ppt/presentation.xml><?xml version="1.0" encoding="utf-8"?>
-<p:presentation xmlns:a="http://schemas.openxmlformats.org/drawingml/2006/main" xmlns:r="http://schemas.openxmlformats.org/officeDocument/2006/relationships" xmlns:p="http://schemas.openxmlformats.org/presentationml/2006/main" saveSubsetFonts="1" autoCompressPictures="0">
+<p:presentation xmlns:a="http://schemas.openxmlformats.org/drawingml/2006/main" xmlns:r="http://schemas.openxmlformats.org/officeDocument/2006/relationships" xmlns:p="http://schemas.openxmlformats.org/presentationml/2006/main" autoCompressPictures="0">
   <p:sldMasterIdLst>
     <p:sldMasterId id="2147483648" r:id="rId1"/>
   </p:sldMasterIdLst>
   <p:sldIdLst>
-    <p:sldId id="256" r:id="rId7"/>
-    <p:sldId id="257" r:id="rId8"/>
-    <p:sldId id="258" r:id="rId9"/>
-    <p:sldId id="259" r:id="rId10"/>
-    <p:sldId id="260" r:id="rId11"/>
-    <p:sldId id="261" r:id="rId12"/>
-    <p:sldId id="262" r:id="rId13"/>
-    <p:sldId id="263" r:id="rId14"/>
-    <p:sldId id="264" r:id="rId15"/>
-    <p:sldId id="265" r:id="rId16"/>
-    <p:sldId id="266" r:id="rId17"/>
-    <p:sldId id="267" r:id="rId18"/>
-    <p:sldId id="268" r:id="rId19"/>
+    <p:sldId id="256" r:id="rId3"/>
+    <p:sldId id="257" r:id="rId4"/>
+    <p:sldId id="258" r:id="rId5"/>
+    <p:sldId id="259" r:id="rId6"/>
+    <p:sldId id="260" r:id="rId7"/>
+    <p:sldId id="261" r:id="rId8"/>
+    <p:sldId id="262" r:id="rId9"/>
+    <p:sldId id="263" r:id="rId10"/>
+    <p:sldId id="264" r:id="rId11"/>
+    <p:sldId id="265" r:id="rId12"/>
+    <p:sldId id="266" r:id="rId13"/>
+    <p:sldId id="267" r:id="rId14"/>
+    <p:sldId id="268" r:id="rId15"/>
   </p:sldIdLst>
-  <p:sldSz cx="12191695" cy="6858000" type="screen4x3"/>
+  <p:sldSz cx="12191365" cy="6858000" type="screen4x3"/>
   <p:notesSz cx="6858000" cy="9144000"/>
   <p:defaultTextStyle>
     <a:defPPr>
@@ -116,6 +116,22 @@
       </a:defRPr>
     </a:lvl9pPr>
   </p:defaultTextStyle>
+  <p:extLst>
+    <p:ext uri="{EFAFB233-063F-42B5-8137-9DF3F51BA10A}">
+      <p15:sldGuideLst xmlns:p15="http://schemas.microsoft.com/office/powerpoint/2012/main">
+        <p15:guide id="1" orient="horz" pos="2160" userDrawn="1">
+          <p15:clr>
+            <a:srgbClr val="A4A3A4"/>
+          </p15:clr>
+        </p15:guide>
+        <p15:guide id="2" pos="2880" userDrawn="1">
+          <p15:clr>
+            <a:srgbClr val="A4A3A4"/>
+          </p15:clr>
+        </p15:guide>
+      </p15:sldGuideLst>
+    </p:ext>
+  </p:extLst>
 </p:presentation>
 </file>
 
@@ -300,7 +316,6 @@
           <a:p>
             <a:fld id="{5BCAD085-E8A6-8845-BD4E-CB4CCA059FC4}" type="datetimeFigureOut">
               <a:rPr lang="en-US" smtClean="0"/>
-              <a:t>1/27/13</a:t>
             </a:fld>
             <a:endParaRPr lang="en-US"/>
           </a:p>
@@ -342,18 +357,12 @@
           <a:p>
             <a:fld id="{C1FF6DA9-008F-8B48-92A6-B652298478BF}" type="slidenum">
               <a:rPr lang="en-US" smtClean="0"/>
-              <a:t>‹#›</a:t>
             </a:fld>
             <a:endParaRPr lang="en-US"/>
           </a:p>
         </p:txBody>
       </p:sp>
     </p:spTree>
-    <p:extLst>
-      <p:ext uri="{BB962C8B-B14F-4D97-AF65-F5344CB8AC3E}">
-        <p14:creationId xmlns:p14="http://schemas.microsoft.com/office/powerpoint/2010/main" val="3168075583"/>
-      </p:ext>
-    </p:extLst>
   </p:cSld>
   <p:clrMapOvr>
     <a:masterClrMapping/>
@@ -421,6 +430,7 @@
               <a:rPr lang="en-US" smtClean="0"/>
               <a:t>Click to edit Master text styles</a:t>
             </a:r>
+            <a:endParaRPr lang="en-US" smtClean="0"/>
           </a:p>
           <a:p>
             <a:pPr lvl="1"/>
@@ -428,6 +438,7 @@
               <a:rPr lang="en-US" smtClean="0"/>
               <a:t>Second level</a:t>
             </a:r>
+            <a:endParaRPr lang="en-US" smtClean="0"/>
           </a:p>
           <a:p>
             <a:pPr lvl="2"/>
@@ -435,6 +446,7 @@
               <a:rPr lang="en-US" smtClean="0"/>
               <a:t>Third level</a:t>
             </a:r>
+            <a:endParaRPr lang="en-US" smtClean="0"/>
           </a:p>
           <a:p>
             <a:pPr lvl="3"/>
@@ -442,6 +454,7 @@
               <a:rPr lang="en-US" smtClean="0"/>
               <a:t>Fourth level</a:t>
             </a:r>
+            <a:endParaRPr lang="en-US" smtClean="0"/>
           </a:p>
           <a:p>
             <a:pPr lvl="4"/>
@@ -470,7 +483,6 @@
           <a:p>
             <a:fld id="{5BCAD085-E8A6-8845-BD4E-CB4CCA059FC4}" type="datetimeFigureOut">
               <a:rPr lang="en-US" smtClean="0"/>
-              <a:t>1/27/13</a:t>
             </a:fld>
             <a:endParaRPr lang="en-US"/>
           </a:p>
@@ -512,18 +524,12 @@
           <a:p>
             <a:fld id="{C1FF6DA9-008F-8B48-92A6-B652298478BF}" type="slidenum">
               <a:rPr lang="en-US" smtClean="0"/>
-              <a:t>‹#›</a:t>
             </a:fld>
             <a:endParaRPr lang="en-US"/>
           </a:p>
         </p:txBody>
       </p:sp>
     </p:spTree>
-    <p:extLst>
-      <p:ext uri="{BB962C8B-B14F-4D97-AF65-F5344CB8AC3E}">
-        <p14:creationId xmlns:p14="http://schemas.microsoft.com/office/powerpoint/2010/main" val="2910927964"/>
-      </p:ext>
-    </p:extLst>
   </p:cSld>
   <p:clrMapOvr>
     <a:masterClrMapping/>
@@ -601,6 +607,7 @@
               <a:rPr lang="en-US" smtClean="0"/>
               <a:t>Click to edit Master text styles</a:t>
             </a:r>
+            <a:endParaRPr lang="en-US" smtClean="0"/>
           </a:p>
           <a:p>
             <a:pPr lvl="1"/>
@@ -608,6 +615,7 @@
               <a:rPr lang="en-US" smtClean="0"/>
               <a:t>Second level</a:t>
             </a:r>
+            <a:endParaRPr lang="en-US" smtClean="0"/>
           </a:p>
           <a:p>
             <a:pPr lvl="2"/>
@@ -615,6 +623,7 @@
               <a:rPr lang="en-US" smtClean="0"/>
               <a:t>Third level</a:t>
             </a:r>
+            <a:endParaRPr lang="en-US" smtClean="0"/>
           </a:p>
           <a:p>
             <a:pPr lvl="3"/>
@@ -622,6 +631,7 @@
               <a:rPr lang="en-US" smtClean="0"/>
               <a:t>Fourth level</a:t>
             </a:r>
+            <a:endParaRPr lang="en-US" smtClean="0"/>
           </a:p>
           <a:p>
             <a:pPr lvl="4"/>
@@ -650,7 +660,6 @@
           <a:p>
             <a:fld id="{5BCAD085-E8A6-8845-BD4E-CB4CCA059FC4}" type="datetimeFigureOut">
               <a:rPr lang="en-US" smtClean="0"/>
-              <a:t>1/27/13</a:t>
             </a:fld>
             <a:endParaRPr lang="en-US"/>
           </a:p>
@@ -692,18 +701,12 @@
           <a:p>
             <a:fld id="{C1FF6DA9-008F-8B48-92A6-B652298478BF}" type="slidenum">
               <a:rPr lang="en-US" smtClean="0"/>
-              <a:t>‹#›</a:t>
             </a:fld>
             <a:endParaRPr lang="en-US"/>
           </a:p>
         </p:txBody>
       </p:sp>
     </p:spTree>
-    <p:extLst>
-      <p:ext uri="{BB962C8B-B14F-4D97-AF65-F5344CB8AC3E}">
-        <p14:creationId xmlns:p14="http://schemas.microsoft.com/office/powerpoint/2010/main" val="3612223792"/>
-      </p:ext>
-    </p:extLst>
   </p:cSld>
   <p:clrMapOvr>
     <a:masterClrMapping/>
@@ -771,6 +774,7 @@
               <a:rPr lang="en-US" smtClean="0"/>
               <a:t>Click to edit Master text styles</a:t>
             </a:r>
+            <a:endParaRPr lang="en-US" smtClean="0"/>
           </a:p>
           <a:p>
             <a:pPr lvl="1"/>
@@ -778,6 +782,7 @@
               <a:rPr lang="en-US" smtClean="0"/>
               <a:t>Second level</a:t>
             </a:r>
+            <a:endParaRPr lang="en-US" smtClean="0"/>
           </a:p>
           <a:p>
             <a:pPr lvl="2"/>
@@ -785,6 +790,7 @@
               <a:rPr lang="en-US" smtClean="0"/>
               <a:t>Third level</a:t>
             </a:r>
+            <a:endParaRPr lang="en-US" smtClean="0"/>
           </a:p>
           <a:p>
             <a:pPr lvl="3"/>
@@ -792,6 +798,7 @@
               <a:rPr lang="en-US" smtClean="0"/>
               <a:t>Fourth level</a:t>
             </a:r>
+            <a:endParaRPr lang="en-US" smtClean="0"/>
           </a:p>
           <a:p>
             <a:pPr lvl="4"/>
@@ -820,7 +827,6 @@
           <a:p>
             <a:fld id="{5BCAD085-E8A6-8845-BD4E-CB4CCA059FC4}" type="datetimeFigureOut">
               <a:rPr lang="en-US" smtClean="0"/>
-              <a:t>1/27/13</a:t>
             </a:fld>
             <a:endParaRPr lang="en-US"/>
           </a:p>
@@ -862,18 +868,12 @@
           <a:p>
             <a:fld id="{C1FF6DA9-008F-8B48-92A6-B652298478BF}" type="slidenum">
               <a:rPr lang="en-US" smtClean="0"/>
-              <a:t>‹#›</a:t>
             </a:fld>
             <a:endParaRPr lang="en-US"/>
           </a:p>
         </p:txBody>
       </p:sp>
     </p:spTree>
-    <p:extLst>
-      <p:ext uri="{BB962C8B-B14F-4D97-AF65-F5344CB8AC3E}">
-        <p14:creationId xmlns:p14="http://schemas.microsoft.com/office/powerpoint/2010/main" val="2614314258"/>
-      </p:ext>
-    </p:extLst>
   </p:cSld>
   <p:clrMapOvr>
     <a:masterClrMapping/>
@@ -1046,6 +1046,7 @@
               <a:rPr lang="en-US" smtClean="0"/>
               <a:t>Click to edit Master text styles</a:t>
             </a:r>
+            <a:endParaRPr lang="en-US" smtClean="0"/>
           </a:p>
         </p:txBody>
       </p:sp>
@@ -1066,7 +1067,6 @@
           <a:p>
             <a:fld id="{5BCAD085-E8A6-8845-BD4E-CB4CCA059FC4}" type="datetimeFigureOut">
               <a:rPr lang="en-US" smtClean="0"/>
-              <a:t>1/27/13</a:t>
             </a:fld>
             <a:endParaRPr lang="en-US"/>
           </a:p>
@@ -1108,18 +1108,12 @@
           <a:p>
             <a:fld id="{C1FF6DA9-008F-8B48-92A6-B652298478BF}" type="slidenum">
               <a:rPr lang="en-US" smtClean="0"/>
-              <a:t>‹#›</a:t>
             </a:fld>
             <a:endParaRPr lang="en-US"/>
           </a:p>
         </p:txBody>
       </p:sp>
     </p:spTree>
-    <p:extLst>
-      <p:ext uri="{BB962C8B-B14F-4D97-AF65-F5344CB8AC3E}">
-        <p14:creationId xmlns:p14="http://schemas.microsoft.com/office/powerpoint/2010/main" val="960648375"/>
-      </p:ext>
-    </p:extLst>
   </p:cSld>
   <p:clrMapOvr>
     <a:masterClrMapping/>
@@ -1220,6 +1214,7 @@
               <a:rPr lang="en-US" smtClean="0"/>
               <a:t>Click to edit Master text styles</a:t>
             </a:r>
+            <a:endParaRPr lang="en-US" smtClean="0"/>
           </a:p>
           <a:p>
             <a:pPr lvl="1"/>
@@ -1227,6 +1222,7 @@
               <a:rPr lang="en-US" smtClean="0"/>
               <a:t>Second level</a:t>
             </a:r>
+            <a:endParaRPr lang="en-US" smtClean="0"/>
           </a:p>
           <a:p>
             <a:pPr lvl="2"/>
@@ -1234,6 +1230,7 @@
               <a:rPr lang="en-US" smtClean="0"/>
               <a:t>Third level</a:t>
             </a:r>
+            <a:endParaRPr lang="en-US" smtClean="0"/>
           </a:p>
           <a:p>
             <a:pPr lvl="3"/>
@@ -1241,6 +1238,7 @@
               <a:rPr lang="en-US" smtClean="0"/>
               <a:t>Fourth level</a:t>
             </a:r>
+            <a:endParaRPr lang="en-US" smtClean="0"/>
           </a:p>
           <a:p>
             <a:pPr lvl="4"/>
@@ -1305,6 +1303,7 @@
               <a:rPr lang="en-US" smtClean="0"/>
               <a:t>Click to edit Master text styles</a:t>
             </a:r>
+            <a:endParaRPr lang="en-US" smtClean="0"/>
           </a:p>
           <a:p>
             <a:pPr lvl="1"/>
@@ -1312,6 +1311,7 @@
               <a:rPr lang="en-US" smtClean="0"/>
               <a:t>Second level</a:t>
             </a:r>
+            <a:endParaRPr lang="en-US" smtClean="0"/>
           </a:p>
           <a:p>
             <a:pPr lvl="2"/>
@@ -1319,6 +1319,7 @@
               <a:rPr lang="en-US" smtClean="0"/>
               <a:t>Third level</a:t>
             </a:r>
+            <a:endParaRPr lang="en-US" smtClean="0"/>
           </a:p>
           <a:p>
             <a:pPr lvl="3"/>
@@ -1326,6 +1327,7 @@
               <a:rPr lang="en-US" smtClean="0"/>
               <a:t>Fourth level</a:t>
             </a:r>
+            <a:endParaRPr lang="en-US" smtClean="0"/>
           </a:p>
           <a:p>
             <a:pPr lvl="4"/>
@@ -1354,7 +1356,6 @@
           <a:p>
             <a:fld id="{5BCAD085-E8A6-8845-BD4E-CB4CCA059FC4}" type="datetimeFigureOut">
               <a:rPr lang="en-US" smtClean="0"/>
-              <a:t>1/27/13</a:t>
             </a:fld>
             <a:endParaRPr lang="en-US"/>
           </a:p>
@@ -1396,18 +1397,12 @@
           <a:p>
             <a:fld id="{C1FF6DA9-008F-8B48-92A6-B652298478BF}" type="slidenum">
               <a:rPr lang="en-US" smtClean="0"/>
-              <a:t>‹#›</a:t>
             </a:fld>
             <a:endParaRPr lang="en-US"/>
           </a:p>
         </p:txBody>
       </p:sp>
     </p:spTree>
-    <p:extLst>
-      <p:ext uri="{BB962C8B-B14F-4D97-AF65-F5344CB8AC3E}">
-        <p14:creationId xmlns:p14="http://schemas.microsoft.com/office/powerpoint/2010/main" val="2782244947"/>
-      </p:ext>
-    </p:extLst>
   </p:cSld>
   <p:clrMapOvr>
     <a:masterClrMapping/>
@@ -1521,6 +1516,7 @@
               <a:rPr lang="en-US" smtClean="0"/>
               <a:t>Click to edit Master text styles</a:t>
             </a:r>
+            <a:endParaRPr lang="en-US" smtClean="0"/>
           </a:p>
         </p:txBody>
       </p:sp>
@@ -1577,6 +1573,7 @@
               <a:rPr lang="en-US" smtClean="0"/>
               <a:t>Click to edit Master text styles</a:t>
             </a:r>
+            <a:endParaRPr lang="en-US" smtClean="0"/>
           </a:p>
           <a:p>
             <a:pPr lvl="1"/>
@@ -1584,6 +1581,7 @@
               <a:rPr lang="en-US" smtClean="0"/>
               <a:t>Second level</a:t>
             </a:r>
+            <a:endParaRPr lang="en-US" smtClean="0"/>
           </a:p>
           <a:p>
             <a:pPr lvl="2"/>
@@ -1591,6 +1589,7 @@
               <a:rPr lang="en-US" smtClean="0"/>
               <a:t>Third level</a:t>
             </a:r>
+            <a:endParaRPr lang="en-US" smtClean="0"/>
           </a:p>
           <a:p>
             <a:pPr lvl="3"/>
@@ -1598,6 +1597,7 @@
               <a:rPr lang="en-US" smtClean="0"/>
               <a:t>Fourth level</a:t>
             </a:r>
+            <a:endParaRPr lang="en-US" smtClean="0"/>
           </a:p>
           <a:p>
             <a:pPr lvl="4"/>
@@ -1671,6 +1671,7 @@
               <a:rPr lang="en-US" smtClean="0"/>
               <a:t>Click to edit Master text styles</a:t>
             </a:r>
+            <a:endParaRPr lang="en-US" smtClean="0"/>
           </a:p>
         </p:txBody>
       </p:sp>
@@ -1727,6 +1728,7 @@
               <a:rPr lang="en-US" smtClean="0"/>
               <a:t>Click to edit Master text styles</a:t>
             </a:r>
+            <a:endParaRPr lang="en-US" smtClean="0"/>
           </a:p>
           <a:p>
             <a:pPr lvl="1"/>
@@ -1734,6 +1736,7 @@
               <a:rPr lang="en-US" smtClean="0"/>
               <a:t>Second level</a:t>
             </a:r>
+            <a:endParaRPr lang="en-US" smtClean="0"/>
           </a:p>
           <a:p>
             <a:pPr lvl="2"/>
@@ -1741,6 +1744,7 @@
               <a:rPr lang="en-US" smtClean="0"/>
               <a:t>Third level</a:t>
             </a:r>
+            <a:endParaRPr lang="en-US" smtClean="0"/>
           </a:p>
           <a:p>
             <a:pPr lvl="3"/>
@@ -1748,6 +1752,7 @@
               <a:rPr lang="en-US" smtClean="0"/>
               <a:t>Fourth level</a:t>
             </a:r>
+            <a:endParaRPr lang="en-US" smtClean="0"/>
           </a:p>
           <a:p>
             <a:pPr lvl="4"/>
@@ -1776,7 +1781,6 @@
           <a:p>
             <a:fld id="{5BCAD085-E8A6-8845-BD4E-CB4CCA059FC4}" type="datetimeFigureOut">
               <a:rPr lang="en-US" smtClean="0"/>
-              <a:t>1/27/13</a:t>
             </a:fld>
             <a:endParaRPr lang="en-US"/>
           </a:p>
@@ -1818,18 +1822,12 @@
           <a:p>
             <a:fld id="{C1FF6DA9-008F-8B48-92A6-B652298478BF}" type="slidenum">
               <a:rPr lang="en-US" smtClean="0"/>
-              <a:t>‹#›</a:t>
             </a:fld>
             <a:endParaRPr lang="en-US"/>
           </a:p>
         </p:txBody>
       </p:sp>
     </p:spTree>
-    <p:extLst>
-      <p:ext uri="{BB962C8B-B14F-4D97-AF65-F5344CB8AC3E}">
-        <p14:creationId xmlns:p14="http://schemas.microsoft.com/office/powerpoint/2010/main" val="990158736"/>
-      </p:ext>
-    </p:extLst>
   </p:cSld>
   <p:clrMapOvr>
     <a:masterClrMapping/>
@@ -1894,7 +1892,6 @@
           <a:p>
             <a:fld id="{5BCAD085-E8A6-8845-BD4E-CB4CCA059FC4}" type="datetimeFigureOut">
               <a:rPr lang="en-US" smtClean="0"/>
-              <a:t>1/27/13</a:t>
             </a:fld>
             <a:endParaRPr lang="en-US"/>
           </a:p>
@@ -1936,18 +1933,12 @@
           <a:p>
             <a:fld id="{C1FF6DA9-008F-8B48-92A6-B652298478BF}" type="slidenum">
               <a:rPr lang="en-US" smtClean="0"/>
-              <a:t>‹#›</a:t>
             </a:fld>
             <a:endParaRPr lang="en-US"/>
           </a:p>
         </p:txBody>
       </p:sp>
     </p:spTree>
-    <p:extLst>
-      <p:ext uri="{BB962C8B-B14F-4D97-AF65-F5344CB8AC3E}">
-        <p14:creationId xmlns:p14="http://schemas.microsoft.com/office/powerpoint/2010/main" val="727027711"/>
-      </p:ext>
-    </p:extLst>
   </p:cSld>
   <p:clrMapOvr>
     <a:masterClrMapping/>
@@ -1989,7 +1980,6 @@
           <a:p>
             <a:fld id="{5BCAD085-E8A6-8845-BD4E-CB4CCA059FC4}" type="datetimeFigureOut">
               <a:rPr lang="en-US" smtClean="0"/>
-              <a:t>1/27/13</a:t>
             </a:fld>
             <a:endParaRPr lang="en-US"/>
           </a:p>
@@ -2031,18 +2021,12 @@
           <a:p>
             <a:fld id="{C1FF6DA9-008F-8B48-92A6-B652298478BF}" type="slidenum">
               <a:rPr lang="en-US" smtClean="0"/>
-              <a:t>‹#›</a:t>
             </a:fld>
             <a:endParaRPr lang="en-US"/>
           </a:p>
         </p:txBody>
       </p:sp>
     </p:spTree>
-    <p:extLst>
-      <p:ext uri="{BB962C8B-B14F-4D97-AF65-F5344CB8AC3E}">
-        <p14:creationId xmlns:p14="http://schemas.microsoft.com/office/powerpoint/2010/main" val="1212999818"/>
-      </p:ext>
-    </p:extLst>
   </p:cSld>
   <p:clrMapOvr>
     <a:masterClrMapping/>
@@ -2152,6 +2136,7 @@
               <a:rPr lang="en-US" smtClean="0"/>
               <a:t>Click to edit Master text styles</a:t>
             </a:r>
+            <a:endParaRPr lang="en-US" smtClean="0"/>
           </a:p>
           <a:p>
             <a:pPr lvl="1"/>
@@ -2159,6 +2144,7 @@
               <a:rPr lang="en-US" smtClean="0"/>
               <a:t>Second level</a:t>
             </a:r>
+            <a:endParaRPr lang="en-US" smtClean="0"/>
           </a:p>
           <a:p>
             <a:pPr lvl="2"/>
@@ -2166,6 +2152,7 @@
               <a:rPr lang="en-US" smtClean="0"/>
               <a:t>Third level</a:t>
             </a:r>
+            <a:endParaRPr lang="en-US" smtClean="0"/>
           </a:p>
           <a:p>
             <a:pPr lvl="3"/>
@@ -2173,6 +2160,7 @@
               <a:rPr lang="en-US" smtClean="0"/>
               <a:t>Fourth level</a:t>
             </a:r>
+            <a:endParaRPr lang="en-US" smtClean="0"/>
           </a:p>
           <a:p>
             <a:pPr lvl="4"/>
@@ -2246,6 +2234,7 @@
               <a:rPr lang="en-US" smtClean="0"/>
               <a:t>Click to edit Master text styles</a:t>
             </a:r>
+            <a:endParaRPr lang="en-US" smtClean="0"/>
           </a:p>
         </p:txBody>
       </p:sp>
@@ -2266,7 +2255,6 @@
           <a:p>
             <a:fld id="{5BCAD085-E8A6-8845-BD4E-CB4CCA059FC4}" type="datetimeFigureOut">
               <a:rPr lang="en-US" smtClean="0"/>
-              <a:t>1/27/13</a:t>
             </a:fld>
             <a:endParaRPr lang="en-US"/>
           </a:p>
@@ -2308,18 +2296,12 @@
           <a:p>
             <a:fld id="{C1FF6DA9-008F-8B48-92A6-B652298478BF}" type="slidenum">
               <a:rPr lang="en-US" smtClean="0"/>
-              <a:t>‹#›</a:t>
             </a:fld>
             <a:endParaRPr lang="en-US"/>
           </a:p>
         </p:txBody>
       </p:sp>
     </p:spTree>
-    <p:extLst>
-      <p:ext uri="{BB962C8B-B14F-4D97-AF65-F5344CB8AC3E}">
-        <p14:creationId xmlns:p14="http://schemas.microsoft.com/office/powerpoint/2010/main" val="1840726560"/>
-      </p:ext>
-    </p:extLst>
   </p:cSld>
   <p:clrMapOvr>
     <a:masterClrMapping/>
@@ -2499,6 +2481,7 @@
               <a:rPr lang="en-US" smtClean="0"/>
               <a:t>Click to edit Master text styles</a:t>
             </a:r>
+            <a:endParaRPr lang="en-US" smtClean="0"/>
           </a:p>
         </p:txBody>
       </p:sp>
@@ -2519,7 +2502,6 @@
           <a:p>
             <a:fld id="{5BCAD085-E8A6-8845-BD4E-CB4CCA059FC4}" type="datetimeFigureOut">
               <a:rPr lang="en-US" smtClean="0"/>
-              <a:t>1/27/13</a:t>
             </a:fld>
             <a:endParaRPr lang="en-US"/>
           </a:p>
@@ -2561,18 +2543,12 @@
           <a:p>
             <a:fld id="{C1FF6DA9-008F-8B48-92A6-B652298478BF}" type="slidenum">
               <a:rPr lang="en-US" smtClean="0"/>
-              <a:t>‹#›</a:t>
             </a:fld>
             <a:endParaRPr lang="en-US"/>
           </a:p>
         </p:txBody>
       </p:sp>
     </p:spTree>
-    <p:extLst>
-      <p:ext uri="{BB962C8B-B14F-4D97-AF65-F5344CB8AC3E}">
-        <p14:creationId xmlns:p14="http://schemas.microsoft.com/office/powerpoint/2010/main" val="3889236939"/>
-      </p:ext>
-    </p:extLst>
   </p:cSld>
   <p:clrMapOvr>
     <a:masterClrMapping/>
@@ -2665,6 +2641,7 @@
               <a:rPr lang="en-US" smtClean="0"/>
               <a:t>Click to edit Master text styles</a:t>
             </a:r>
+            <a:endParaRPr lang="en-US" smtClean="0"/>
           </a:p>
           <a:p>
             <a:pPr lvl="1"/>
@@ -2672,6 +2649,7 @@
               <a:rPr lang="en-US" smtClean="0"/>
               <a:t>Second level</a:t>
             </a:r>
+            <a:endParaRPr lang="en-US" smtClean="0"/>
           </a:p>
           <a:p>
             <a:pPr lvl="2"/>
@@ -2679,6 +2657,7 @@
               <a:rPr lang="en-US" smtClean="0"/>
               <a:t>Third level</a:t>
             </a:r>
+            <a:endParaRPr lang="en-US" smtClean="0"/>
           </a:p>
           <a:p>
             <a:pPr lvl="3"/>
@@ -2686,6 +2665,7 @@
               <a:rPr lang="en-US" smtClean="0"/>
               <a:t>Fourth level</a:t>
             </a:r>
+            <a:endParaRPr lang="en-US" smtClean="0"/>
           </a:p>
           <a:p>
             <a:pPr lvl="4"/>
@@ -2732,7 +2712,6 @@
           <a:p>
             <a:fld id="{5BCAD085-E8A6-8845-BD4E-CB4CCA059FC4}" type="datetimeFigureOut">
               <a:rPr lang="en-US" smtClean="0"/>
-              <a:t>1/27/13</a:t>
             </a:fld>
             <a:endParaRPr lang="en-US"/>
           </a:p>
@@ -2810,18 +2789,12 @@
           <a:p>
             <a:fld id="{C1FF6DA9-008F-8B48-92A6-B652298478BF}" type="slidenum">
               <a:rPr lang="en-US" smtClean="0"/>
-              <a:t>‹#›</a:t>
             </a:fld>
             <a:endParaRPr lang="en-US"/>
           </a:p>
         </p:txBody>
       </p:sp>
     </p:spTree>
-    <p:extLst>
-      <p:ext uri="{BB962C8B-B14F-4D97-AF65-F5344CB8AC3E}">
-        <p14:creationId xmlns:p14="http://schemas.microsoft.com/office/powerpoint/2010/main" val="2209977519"/>
-      </p:ext>
-    </p:extLst>
   </p:cSld>
   <p:clrMap bg1="lt1" tx1="dk1" bg2="lt2" tx2="dk2" accent1="accent1" accent2="accent2" accent3="accent3" accent4="accent4" accent5="accent5" accent6="accent6" hlink="hlink" folHlink="folHlink"/>
   <p:sldLayoutIdLst>
@@ -2859,7 +2832,7 @@
         <a:spcBef>
           <a:spcPct val="20000"/>
         </a:spcBef>
-        <a:buFont typeface="Arial"/>
+        <a:buFont typeface="Arial" panose="020B0604020202090204"/>
         <a:buChar char="•"/>
         <a:defRPr sz="3200" kern="1200">
           <a:solidFill>
@@ -2874,7 +2847,7 @@
         <a:spcBef>
           <a:spcPct val="20000"/>
         </a:spcBef>
-        <a:buFont typeface="Arial"/>
+        <a:buFont typeface="Arial" panose="020B0604020202090204"/>
         <a:buChar char="–"/>
         <a:defRPr sz="2800" kern="1200">
           <a:solidFill>
@@ -2889,7 +2862,7 @@
         <a:spcBef>
           <a:spcPct val="20000"/>
         </a:spcBef>
-        <a:buFont typeface="Arial"/>
+        <a:buFont typeface="Arial" panose="020B0604020202090204"/>
         <a:buChar char="•"/>
         <a:defRPr sz="2400" kern="1200">
           <a:solidFill>
@@ -2904,7 +2877,7 @@
         <a:spcBef>
           <a:spcPct val="20000"/>
         </a:spcBef>
-        <a:buFont typeface="Arial"/>
+        <a:buFont typeface="Arial" panose="020B0604020202090204"/>
         <a:buChar char="–"/>
         <a:defRPr sz="2000" kern="1200">
           <a:solidFill>
@@ -2919,7 +2892,7 @@
         <a:spcBef>
           <a:spcPct val="20000"/>
         </a:spcBef>
-        <a:buFont typeface="Arial"/>
+        <a:buFont typeface="Arial" panose="020B0604020202090204"/>
         <a:buChar char="»"/>
         <a:defRPr sz="2000" kern="1200">
           <a:solidFill>
@@ -2934,7 +2907,7 @@
         <a:spcBef>
           <a:spcPct val="20000"/>
         </a:spcBef>
-        <a:buFont typeface="Arial"/>
+        <a:buFont typeface="Arial" panose="020B0604020202090204"/>
         <a:buChar char="•"/>
         <a:defRPr sz="2000" kern="1200">
           <a:solidFill>
@@ -2949,7 +2922,7 @@
         <a:spcBef>
           <a:spcPct val="20000"/>
         </a:spcBef>
-        <a:buFont typeface="Arial"/>
+        <a:buFont typeface="Arial" panose="020B0604020202090204"/>
         <a:buChar char="•"/>
         <a:defRPr sz="2000" kern="1200">
           <a:solidFill>
@@ -2964,7 +2937,7 @@
         <a:spcBef>
           <a:spcPct val="20000"/>
         </a:spcBef>
-        <a:buFont typeface="Arial"/>
+        <a:buFont typeface="Arial" panose="020B0604020202090204"/>
         <a:buChar char="•"/>
         <a:defRPr sz="2000" kern="1200">
           <a:solidFill>
@@ -2979,7 +2952,7 @@
         <a:spcBef>
           <a:spcPct val="20000"/>
         </a:spcBef>
-        <a:buFont typeface="Arial"/>
+        <a:buFont typeface="Arial" panose="020B0604020202090204"/>
         <a:buChar char="•"/>
         <a:defRPr sz="2000" kern="1200">
           <a:solidFill>
@@ -3091,7 +3064,7 @@
 </file>
 
 <file path=ppt/slides/slide1.xml><?xml version="1.0" encoding="utf-8"?>
-<p:sld xmlns:a="http://schemas.openxmlformats.org/drawingml/2006/main" xmlns:p="http://schemas.openxmlformats.org/presentationml/2006/main" xmlns:r="http://schemas.openxmlformats.org/officeDocument/2006/relationships">
+<p:sld xmlns:a="http://schemas.openxmlformats.org/drawingml/2006/main" xmlns:r="http://schemas.openxmlformats.org/officeDocument/2006/relationships" xmlns:p="http://schemas.openxmlformats.org/presentationml/2006/main">
   <p:cSld>
     <p:bg>
       <p:bgPr>
@@ -3232,7 +3205,7 @@
         <p:spPr>
           <a:xfrm>
             <a:off x="1828800" y="3291840"/>
-            <a:ext cx="8534095" cy="1828800"/>
+            <a:ext cx="8534095" cy="1214755"/>
           </a:xfrm>
           <a:prstGeom prst="rect">
             <a:avLst/>
@@ -3257,7 +3230,7 @@
               </a:defRPr>
             </a:pPr>
             <a:r>
-              <a:t>计科 241/242 班 · 第 3 组</a:t>
+              <a:t>计科242 班 · 第 3 组</a:t>
             </a:r>
           </a:p>
           <a:p>
@@ -3355,7 +3328,7 @@
 </file>
 
 <file path=ppt/slides/slide10.xml><?xml version="1.0" encoding="utf-8"?>
-<p:sld xmlns:a="http://schemas.openxmlformats.org/drawingml/2006/main" xmlns:p="http://schemas.openxmlformats.org/presentationml/2006/main" xmlns:r="http://schemas.openxmlformats.org/officeDocument/2006/relationships">
+<p:sld xmlns:a="http://schemas.openxmlformats.org/drawingml/2006/main" xmlns:r="http://schemas.openxmlformats.org/officeDocument/2006/relationships" xmlns:p="http://schemas.openxmlformats.org/presentationml/2006/main">
   <p:cSld>
     <p:bg>
       <p:bgPr>
@@ -3408,7 +3381,7 @@
           </a:fontRef>
         </p:style>
         <p:txBody>
-          <a:bodyPr rtlCol="0" anchor="ctr" wrap="square" lIns="731520"/>
+          <a:bodyPr wrap="square" lIns="731520" rtlCol="0" anchor="ctr"/>
           <a:lstStyle/>
           <a:p>
             <a:pPr algn="l">
@@ -4121,7 +4094,7 @@
 </file>
 
 <file path=ppt/slides/slide11.xml><?xml version="1.0" encoding="utf-8"?>
-<p:sld xmlns:a="http://schemas.openxmlformats.org/drawingml/2006/main" xmlns:p="http://schemas.openxmlformats.org/presentationml/2006/main" xmlns:r="http://schemas.openxmlformats.org/officeDocument/2006/relationships">
+<p:sld xmlns:a="http://schemas.openxmlformats.org/drawingml/2006/main" xmlns:r="http://schemas.openxmlformats.org/officeDocument/2006/relationships" xmlns:p="http://schemas.openxmlformats.org/presentationml/2006/main">
   <p:cSld>
     <p:bg>
       <p:bgPr>
@@ -4174,7 +4147,7 @@
           </a:fontRef>
         </p:style>
         <p:txBody>
-          <a:bodyPr rtlCol="0" anchor="ctr" wrap="square" lIns="731520"/>
+          <a:bodyPr wrap="square" lIns="731520" rtlCol="0" anchor="ctr"/>
           <a:lstStyle/>
           <a:p>
             <a:pPr algn="l">
@@ -5286,7 +5259,7 @@
 </file>
 
 <file path=ppt/slides/slide12.xml><?xml version="1.0" encoding="utf-8"?>
-<p:sld xmlns:a="http://schemas.openxmlformats.org/drawingml/2006/main" xmlns:p="http://schemas.openxmlformats.org/presentationml/2006/main" xmlns:r="http://schemas.openxmlformats.org/officeDocument/2006/relationships">
+<p:sld xmlns:a="http://schemas.openxmlformats.org/drawingml/2006/main" xmlns:r="http://schemas.openxmlformats.org/officeDocument/2006/relationships" xmlns:p="http://schemas.openxmlformats.org/presentationml/2006/main">
   <p:cSld>
     <p:bg>
       <p:bgPr>
@@ -5339,7 +5312,7 @@
           </a:fontRef>
         </p:style>
         <p:txBody>
-          <a:bodyPr rtlCol="0" anchor="ctr" wrap="square" lIns="731520"/>
+          <a:bodyPr wrap="square" lIns="731520" rtlCol="0" anchor="ctr"/>
           <a:lstStyle/>
           <a:p>
             <a:pPr algn="l">
@@ -5952,7 +5925,7 @@
 </file>
 
 <file path=ppt/slides/slide13.xml><?xml version="1.0" encoding="utf-8"?>
-<p:sld xmlns:a="http://schemas.openxmlformats.org/drawingml/2006/main" xmlns:p="http://schemas.openxmlformats.org/presentationml/2006/main" xmlns:r="http://schemas.openxmlformats.org/officeDocument/2006/relationships">
+<p:sld xmlns:a="http://schemas.openxmlformats.org/drawingml/2006/main" xmlns:r="http://schemas.openxmlformats.org/officeDocument/2006/relationships" xmlns:p="http://schemas.openxmlformats.org/presentationml/2006/main">
   <p:cSld>
     <p:bg>
       <p:bgPr>
@@ -5971,57 +5944,14 @@
       <p:grpSpPr/>
       <p:sp>
         <p:nvSpPr>
-          <p:cNvPr id="2" name="Rectangle 1"/>
-          <p:cNvSpPr/>
-          <p:nvPr/>
-        </p:nvSpPr>
-        <p:spPr>
-          <a:xfrm>
-            <a:off x="1828800" y="2560320"/>
-            <a:ext cx="8534095" cy="38100"/>
-          </a:xfrm>
-          <a:prstGeom prst="rect">
-            <a:avLst/>
-          </a:prstGeom>
-          <a:solidFill>
-            <a:srgbClr val="64B5F6"/>
-          </a:solidFill>
-          <a:ln>
-            <a:noFill/>
-          </a:ln>
-        </p:spPr>
-        <p:style>
-          <a:lnRef idx="1">
-            <a:schemeClr val="accent1"/>
-          </a:lnRef>
-          <a:fillRef idx="3">
-            <a:schemeClr val="accent1"/>
-          </a:fillRef>
-          <a:effectRef idx="2">
-            <a:schemeClr val="accent1"/>
-          </a:effectRef>
-          <a:fontRef idx="minor">
-            <a:schemeClr val="lt1"/>
-          </a:fontRef>
-        </p:style>
-        <p:txBody>
-          <a:bodyPr rtlCol="0" anchor="ctr"/>
-          <a:lstStyle/>
-          <a:p>
-            <a:pPr algn="ctr"/>
-          </a:p>
-        </p:txBody>
-      </p:sp>
-      <p:sp>
-        <p:nvSpPr>
           <p:cNvPr id="3" name="TextBox 2"/>
           <p:cNvSpPr txBox="1"/>
           <p:nvPr/>
         </p:nvSpPr>
         <p:spPr>
           <a:xfrm>
-            <a:off x="1828800" y="1371600"/>
-            <a:ext cx="8534095" cy="1097280"/>
+            <a:off x="1816100" y="2537460"/>
+            <a:ext cx="8534095" cy="891540"/>
           </a:xfrm>
           <a:prstGeom prst="rect">
             <a:avLst/>
@@ -6043,76 +5973,14 @@
               </a:defRPr>
             </a:pPr>
             <a:r>
-              <a:t>致  谢</a:t>
-            </a:r>
-          </a:p>
-        </p:txBody>
-      </p:sp>
-      <p:sp>
-        <p:nvSpPr>
-          <p:cNvPr id="4" name="TextBox 3"/>
-          <p:cNvSpPr txBox="1"/>
-          <p:nvPr/>
-        </p:nvSpPr>
-        <p:spPr>
-          <a:xfrm>
-            <a:off x="1828800" y="2926080"/>
-            <a:ext cx="8534095" cy="2286000"/>
-          </a:xfrm>
-          <a:prstGeom prst="rect">
-            <a:avLst/>
-          </a:prstGeom>
-          <a:noFill/>
-        </p:spPr>
-        <p:txBody>
-          <a:bodyPr wrap="square">
-            <a:spAutoFit/>
-          </a:bodyPr>
-          <a:lstStyle/>
-          <a:p>
-            <a:pPr algn="ctr">
-              <a:spcAft>
-                <a:spcPts val="780"/>
-              </a:spcAft>
-              <a:defRPr sz="2600" b="0">
-                <a:solidFill>
-                  <a:srgbClr val="AAAAAA"/>
-                </a:solidFill>
-                <a:latin typeface="微软雅黑"/>
-              </a:defRPr>
-            </a:pPr>
-            <a:r>
-              <a:t>感谢周文峰老师的指导</a:t>
-            </a:r>
-          </a:p>
-          <a:p>
-            <a:pPr algn="ctr">
-              <a:spcAft>
-                <a:spcPts val="780"/>
-              </a:spcAft>
-              <a:defRPr sz="1000" b="0">
-                <a:solidFill>
-                  <a:srgbClr val="AAAAAA"/>
-                </a:solidFill>
-                <a:latin typeface="微软雅黑"/>
-              </a:defRPr>
-            </a:pPr>
-          </a:p>
-          <a:p>
-            <a:pPr algn="ctr">
-              <a:spcAft>
-                <a:spcPts val="780"/>
-              </a:spcAft>
-              <a:defRPr sz="2200" b="0">
-                <a:solidFill>
-                  <a:srgbClr val="AAAAAA"/>
-                </a:solidFill>
-                <a:latin typeface="微软雅黑"/>
-              </a:defRPr>
-            </a:pPr>
-            <a:r>
-              <a:t>恳请各位老师批评指正</a:t>
-            </a:r>
+              <a:rPr lang="zh-CN"/>
+              <a:t>恳请各位</a:t>
+            </a:r>
+            <a:r>
+              <a:rPr lang="zh-CN"/>
+              <a:t>批评指正</a:t>
+            </a:r>
+            <a:endParaRPr lang="zh-CN"/>
           </a:p>
         </p:txBody>
       </p:sp>
@@ -6177,7 +6045,7 @@
 </file>
 
 <file path=ppt/slides/slide2.xml><?xml version="1.0" encoding="utf-8"?>
-<p:sld xmlns:a="http://schemas.openxmlformats.org/drawingml/2006/main" xmlns:p="http://schemas.openxmlformats.org/presentationml/2006/main" xmlns:r="http://schemas.openxmlformats.org/officeDocument/2006/relationships">
+<p:sld xmlns:a="http://schemas.openxmlformats.org/drawingml/2006/main" xmlns:r="http://schemas.openxmlformats.org/officeDocument/2006/relationships" xmlns:p="http://schemas.openxmlformats.org/presentationml/2006/main">
   <p:cSld>
     <p:bg>
       <p:bgPr>
@@ -6230,7 +6098,7 @@
           </a:fontRef>
         </p:style>
         <p:txBody>
-          <a:bodyPr rtlCol="0" anchor="ctr" wrap="square" lIns="731520"/>
+          <a:bodyPr wrap="square" lIns="731520" rtlCol="0" anchor="ctr"/>
           <a:lstStyle/>
           <a:p>
             <a:pPr algn="l">
@@ -6559,16 +6427,16 @@
         <p:spPr>
           <a:xfrm>
             <a:off x="2011680" y="3520440"/>
-            <a:ext cx="2743200" cy="411480"/>
-          </a:xfrm>
-          <a:prstGeom prst="rect">
-            <a:avLst/>
-          </a:prstGeom>
-          <a:noFill/>
-        </p:spPr>
-        <p:txBody>
-          <a:bodyPr wrap="square">
-            <a:spAutoFit/>
+            <a:ext cx="2971800" cy="426085"/>
+          </a:xfrm>
+          <a:prstGeom prst="rect">
+            <a:avLst/>
+          </a:prstGeom>
+          <a:noFill/>
+        </p:spPr>
+        <p:txBody>
+          <a:bodyPr wrap="square">
+            <a:noAutofit/>
           </a:bodyPr>
           <a:lstStyle/>
           <a:p>
@@ -6775,16 +6643,16 @@
         <p:spPr>
           <a:xfrm>
             <a:off x="2011680" y="5532120"/>
-            <a:ext cx="2743200" cy="411480"/>
-          </a:xfrm>
-          <a:prstGeom prst="rect">
-            <a:avLst/>
-          </a:prstGeom>
-          <a:noFill/>
-        </p:spPr>
-        <p:txBody>
-          <a:bodyPr wrap="square">
-            <a:spAutoFit/>
+            <a:ext cx="2962275" cy="423545"/>
+          </a:xfrm>
+          <a:prstGeom prst="rect">
+            <a:avLst/>
+          </a:prstGeom>
+          <a:noFill/>
+        </p:spPr>
+        <p:txBody>
+          <a:bodyPr wrap="square">
+            <a:noAutofit/>
           </a:bodyPr>
           <a:lstStyle/>
           <a:p>
@@ -6847,7 +6715,7 @@
 </file>
 
 <file path=ppt/slides/slide3.xml><?xml version="1.0" encoding="utf-8"?>
-<p:sld xmlns:a="http://schemas.openxmlformats.org/drawingml/2006/main" xmlns:p="http://schemas.openxmlformats.org/presentationml/2006/main" xmlns:r="http://schemas.openxmlformats.org/officeDocument/2006/relationships">
+<p:sld xmlns:a="http://schemas.openxmlformats.org/drawingml/2006/main" xmlns:r="http://schemas.openxmlformats.org/officeDocument/2006/relationships" xmlns:p="http://schemas.openxmlformats.org/presentationml/2006/main">
   <p:cSld>
     <p:bg>
       <p:bgPr>
@@ -6900,7 +6768,7 @@
           </a:fontRef>
         </p:style>
         <p:txBody>
-          <a:bodyPr rtlCol="0" anchor="ctr" wrap="square" lIns="731520"/>
+          <a:bodyPr wrap="square" lIns="731520" rtlCol="0" anchor="ctr"/>
           <a:lstStyle/>
           <a:p>
             <a:pPr algn="l">
@@ -7409,7 +7277,7 @@
 </file>
 
 <file path=ppt/slides/slide4.xml><?xml version="1.0" encoding="utf-8"?>
-<p:sld xmlns:a="http://schemas.openxmlformats.org/drawingml/2006/main" xmlns:p="http://schemas.openxmlformats.org/presentationml/2006/main" xmlns:r="http://schemas.openxmlformats.org/officeDocument/2006/relationships">
+<p:sld xmlns:a="http://schemas.openxmlformats.org/drawingml/2006/main" xmlns:r="http://schemas.openxmlformats.org/officeDocument/2006/relationships" xmlns:p="http://schemas.openxmlformats.org/presentationml/2006/main">
   <p:cSld>
     <p:bg>
       <p:bgPr>
@@ -7462,7 +7330,7 @@
           </a:fontRef>
         </p:style>
         <p:txBody>
-          <a:bodyPr rtlCol="0" anchor="ctr" wrap="square" lIns="731520"/>
+          <a:bodyPr wrap="square" lIns="731520" rtlCol="0" anchor="ctr"/>
           <a:lstStyle/>
           <a:p>
             <a:pPr algn="l">
@@ -8597,7 +8465,7 @@
 </file>
 
 <file path=ppt/slides/slide5.xml><?xml version="1.0" encoding="utf-8"?>
-<p:sld xmlns:a="http://schemas.openxmlformats.org/drawingml/2006/main" xmlns:p="http://schemas.openxmlformats.org/presentationml/2006/main" xmlns:r="http://schemas.openxmlformats.org/officeDocument/2006/relationships">
+<p:sld xmlns:a="http://schemas.openxmlformats.org/drawingml/2006/main" xmlns:r="http://schemas.openxmlformats.org/officeDocument/2006/relationships" xmlns:p="http://schemas.openxmlformats.org/presentationml/2006/main">
   <p:cSld>
     <p:bg>
       <p:bgPr>
@@ -8650,7 +8518,7 @@
           </a:fontRef>
         </p:style>
         <p:txBody>
-          <a:bodyPr rtlCol="0" anchor="ctr" wrap="square" lIns="731520"/>
+          <a:bodyPr wrap="square" lIns="731520" rtlCol="0" anchor="ctr"/>
           <a:lstStyle/>
           <a:p>
             <a:pPr algn="l">
@@ -9555,7 +9423,7 @@
 </file>
 
 <file path=ppt/slides/slide6.xml><?xml version="1.0" encoding="utf-8"?>
-<p:sld xmlns:a="http://schemas.openxmlformats.org/drawingml/2006/main" xmlns:p="http://schemas.openxmlformats.org/presentationml/2006/main" xmlns:r="http://schemas.openxmlformats.org/officeDocument/2006/relationships">
+<p:sld xmlns:a="http://schemas.openxmlformats.org/drawingml/2006/main" xmlns:r="http://schemas.openxmlformats.org/officeDocument/2006/relationships" xmlns:p="http://schemas.openxmlformats.org/presentationml/2006/main">
   <p:cSld>
     <p:bg>
       <p:bgPr>
@@ -9608,7 +9476,7 @@
           </a:fontRef>
         </p:style>
         <p:txBody>
-          <a:bodyPr rtlCol="0" anchor="ctr" wrap="square" lIns="731520"/>
+          <a:bodyPr wrap="square" lIns="731520" rtlCol="0" anchor="ctr"/>
           <a:lstStyle/>
           <a:p>
             <a:pPr algn="l">
@@ -10171,7 +10039,7 @@
         <p:spPr>
           <a:xfrm>
             <a:off x="731520" y="5303520"/>
-            <a:ext cx="10058400" cy="548640"/>
+            <a:ext cx="10058400" cy="645160"/>
           </a:xfrm>
           <a:prstGeom prst="rect">
             <a:avLst/>
@@ -10193,7 +10061,7 @@
               </a:defRPr>
             </a:pPr>
             <a:r>
-              <a:t>核心思想：排的是索引，不是记录本身。不改变原始顺序，通过索引间接表达排名——这是教材第6章"内排序"的核心技巧。</a:t>
+              <a:t>核心思想：排的是索引，不是记录本身。不改变原始顺序，通过索引间接表达排名——教材第6章"内排序"的核心技巧。</a:t>
             </a:r>
           </a:p>
         </p:txBody>
@@ -10207,7 +10075,7 @@
 </file>
 
 <file path=ppt/slides/slide7.xml><?xml version="1.0" encoding="utf-8"?>
-<p:sld xmlns:a="http://schemas.openxmlformats.org/drawingml/2006/main" xmlns:p="http://schemas.openxmlformats.org/presentationml/2006/main" xmlns:r="http://schemas.openxmlformats.org/officeDocument/2006/relationships">
+<p:sld xmlns:a="http://schemas.openxmlformats.org/drawingml/2006/main" xmlns:r="http://schemas.openxmlformats.org/officeDocument/2006/relationships" xmlns:p="http://schemas.openxmlformats.org/presentationml/2006/main">
   <p:cSld>
     <p:bg>
       <p:bgPr>
@@ -10260,7 +10128,7 @@
           </a:fontRef>
         </p:style>
         <p:txBody>
-          <a:bodyPr rtlCol="0" anchor="ctr" wrap="square" lIns="731520"/>
+          <a:bodyPr wrap="square" lIns="731520" rtlCol="0" anchor="ctr"/>
           <a:lstStyle/>
           <a:p>
             <a:pPr algn="l">
@@ -10391,7 +10259,7 @@
                 <a:solidFill>
                   <a:srgbClr val="81C784"/>
                 </a:solidFill>
-                <a:latin typeface="Courier New"/>
+                <a:latin typeface="Courier New" panose="02070409020205090404"/>
               </a:defRPr>
             </a:pPr>
             <a:r>
@@ -10505,7 +10373,7 @@
                 <a:solidFill>
                   <a:srgbClr val="81C784"/>
                 </a:solidFill>
-                <a:latin typeface="Courier New"/>
+                <a:latin typeface="Courier New" panose="02070409020205090404"/>
               </a:defRPr>
             </a:pPr>
             <a:r>
@@ -10695,7 +10563,7 @@
 </file>
 
 <file path=ppt/slides/slide8.xml><?xml version="1.0" encoding="utf-8"?>
-<p:sld xmlns:a="http://schemas.openxmlformats.org/drawingml/2006/main" xmlns:p="http://schemas.openxmlformats.org/presentationml/2006/main" xmlns:r="http://schemas.openxmlformats.org/officeDocument/2006/relationships">
+<p:sld xmlns:a="http://schemas.openxmlformats.org/drawingml/2006/main" xmlns:r="http://schemas.openxmlformats.org/officeDocument/2006/relationships" xmlns:p="http://schemas.openxmlformats.org/presentationml/2006/main">
   <p:cSld>
     <p:bg>
       <p:bgPr>
@@ -10748,7 +10616,7 @@
           </a:fontRef>
         </p:style>
         <p:txBody>
-          <a:bodyPr rtlCol="0" anchor="ctr" wrap="square" lIns="731520"/>
+          <a:bodyPr wrap="square" lIns="731520" rtlCol="0" anchor="ctr"/>
           <a:lstStyle/>
           <a:p>
             <a:pPr algn="l">
@@ -10879,7 +10747,7 @@
                 <a:solidFill>
                   <a:srgbClr val="81C784"/>
                 </a:solidFill>
-                <a:latin typeface="Courier New"/>
+                <a:latin typeface="Courier New" panose="02070409020205090404"/>
               </a:defRPr>
             </a:pPr>
             <a:r>
@@ -11422,7 +11290,7 @@
 </file>
 
 <file path=ppt/slides/slide9.xml><?xml version="1.0" encoding="utf-8"?>
-<p:sld xmlns:a="http://schemas.openxmlformats.org/drawingml/2006/main" xmlns:p="http://schemas.openxmlformats.org/presentationml/2006/main" xmlns:r="http://schemas.openxmlformats.org/officeDocument/2006/relationships">
+<p:sld xmlns:a="http://schemas.openxmlformats.org/drawingml/2006/main" xmlns:r="http://schemas.openxmlformats.org/officeDocument/2006/relationships" xmlns:p="http://schemas.openxmlformats.org/presentationml/2006/main">
   <p:cSld>
     <p:bg>
       <p:bgPr>
@@ -11475,7 +11343,7 @@
           </a:fontRef>
         </p:style>
         <p:txBody>
-          <a:bodyPr rtlCol="0" anchor="ctr" wrap="square" lIns="731520"/>
+          <a:bodyPr wrap="square" lIns="731520" rtlCol="0" anchor="ctr"/>
           <a:lstStyle/>
           <a:p>
             <a:pPr algn="l">
@@ -14037,6 +13905,10 @@
       </a:style>
     </a:lnDef>
   </a:objectDefaults>
-  <a:extraClrSchemeLst/>
+  <a:extLst>
+    <a:ext uri="{05A4C25C-085E-4340-85A3-A5531E510DB2}">
+      <thm15:themeFamily xmlns:thm15="http://schemas.microsoft.com/office/thememl/2012/main" name="Office Theme" id="{62F939B6-93AF-4DB8-9C6B-D6C7DFDC589F}" vid="{4A3C46E8-61CC-4603-A589-7422A47A8E4A}"/>
+    </a:ext>
+  </a:extLst>
 </a:theme>
 </file>